--- a/public/fun/pack/pptx/familypro/가족소개프리미엄_05_반려동물과함께_라일락실버.pptx
+++ b/public/fun/pack/pptx/familypro/가족소개프리미엄_05_반려동물과함께_라일락실버.pptx
@@ -113,12 +113,12 @@
   <p:extLst>
     <p:ext uri="{521415D9-36F7-43E2-AB2F-B90AF26B5E84}">
       <p14:sectionLst xmlns:p14="http://schemas.microsoft.com/office/powerpoint/2010/main">
-        <p14:section name="시작" id="{AA5C0A24-D878-40AD-B601-959AEFA04FB3}">
+        <p14:section name="시작" id="{1A4DD395-6E68-467C-8B3A-62566237000D}">
           <p14:sldIdLst>
             <p14:sldId id="256"/>
           </p14:sldIdLst>
         </p14:section>
-        <p14:section name="본문" id="{3769DF41-0AEE-4AA0-88FF-39EF48FDB964}">
+        <p14:section name="본문" id="{ABFB6C4C-E051-4CCA-ADE8-1784D652F712}">
           <p14:sldIdLst>
             <p14:sldId id="257"/>
             <p14:sldId id="258"/>
@@ -127,7 +127,7 @@
             <p14:sldId id="261"/>
           </p14:sldIdLst>
         </p14:section>
-        <p14:section name="마무리" id="{707F36C2-E8DB-42F6-95EB-FB147B534FF2}">
+        <p14:section name="마무리" id="{62733DC6-1E10-43AD-8A99-C69C1F9A6515}">
           <p14:sldIdLst>
             <p14:sldId id="262"/>
           </p14:sldIdLst>
@@ -1576,7 +1576,7 @@
             </a:lvl1pPr>
           </a:lstStyle>
           <a:p>
-            <a:fld id="{313B9A15-5385-46D5-82C3-195021D75235}" type="slidenum">
+            <a:fld id="{1B036597-457E-4FB9-BBBC-B39A861D7A8E}" type="slidenum">
               <a:rPr lang="en-US"/>
               <a:t>‹#›</a:t>
             </a:fld>
@@ -2221,7 +2221,7 @@
             </a:lvl1pPr>
           </a:lstStyle>
           <a:p>
-            <a:fld id="{97E05FDF-9AF3-49F1-A925-AE54133D1B9F}" type="slidenum">
+            <a:fld id="{5F2DA4B6-A2C9-4E38-912A-91782C647F94}" type="slidenum">
               <a:rPr lang="en-US"/>
               <a:t>‹#›</a:t>
             </a:fld>
@@ -2818,7 +2818,7 @@
             </a:lvl1pPr>
           </a:lstStyle>
           <a:p>
-            <a:fld id="{A4C4855A-3184-45DB-912C-5162692CA77C}" type="slidenum">
+            <a:fld id="{72B07FC1-E0A4-4E42-AD8A-126EF5E3F1F3}" type="slidenum">
               <a:rPr lang="en-US"/>
               <a:t>‹#›</a:t>
             </a:fld>
@@ -3643,7 +3643,7 @@
           <a:p>
             <a:r>
               <a:rPr lang="ko-KR"/>
-              <a:t>반려동물과 함께 · 0000. 00. 00</a:t>
+              <a:t>반려동물과 함께 · 날짜 입력</a:t>
             </a:r>
           </a:p>
         </p:txBody>
@@ -3935,7 +3935,7 @@
           <a:bodyPr/>
           <a:lstStyle/>
           <a:p>
-            <a:fld id="{4A070677-15BF-4E29-B10D-3C2E607E7AF1}" type="slidenum">
+            <a:fld id="{7E263716-5FEB-4D78-ADFC-E178CE3B4951}" type="slidenum">
               <a:rPr lang="en-US"/>
               <a:t>‹#›</a:t>
             </a:fld>
@@ -4494,7 +4494,7 @@
           <a:bodyPr/>
           <a:lstStyle/>
           <a:p>
-            <a:fld id="{85282197-34D0-4E53-A88B-7167537A901A}" type="slidenum">
+            <a:fld id="{636691FD-62A4-4C22-9D35-B696544D82C5}" type="slidenum">
               <a:rPr lang="en-US"/>
               <a:t>‹#›</a:t>
             </a:fld>
@@ -5336,7 +5336,7 @@
           <a:bodyPr/>
           <a:lstStyle/>
           <a:p>
-            <a:fld id="{DB92C25B-724D-43DB-8A99-3932D817DA15}" type="slidenum">
+            <a:fld id="{AAD427F1-BF37-4204-B155-35902D146860}" type="slidenum">
               <a:rPr lang="en-US"/>
               <a:t>‹#›</a:t>
             </a:fld>
@@ -6600,7 +6600,7 @@
           <a:bodyPr/>
           <a:lstStyle/>
           <a:p>
-            <a:fld id="{73EA25CE-DC29-4DA6-B7DA-A536FC2CDDB4}" type="slidenum">
+            <a:fld id="{A31EEB87-925A-4E1C-9AF6-EB65908FD0C0}" type="slidenum">
               <a:rPr lang="en-US"/>
               <a:t>‹#›</a:t>
             </a:fld>
@@ -6688,7 +6688,7 @@
           <a:bodyPr/>
           <a:lstStyle/>
           <a:p>
-            <a:fld id="{22174D22-C024-4930-AF97-58465E64FF4B}" type="slidenum">
+            <a:fld id="{DD85D8D8-51CA-49B0-AA51-961505A0A5E2}" type="slidenum">
               <a:rPr lang="en-US"/>
               <a:t>‹#›</a:t>
             </a:fld>
